--- a/server-assets/docs/GIS-KPI-Dashboard-Workflow-Deck.pptx
+++ b/server-assets/docs/GIS-KPI-Dashboard-Workflow-Deck.pptx
@@ -1867,7 +1867,7 @@
                 <a:ea typeface="Calibri" pitchFamily="34" charset="-122"/>
                 <a:cs typeface="Calibri" pitchFamily="34" charset="-120"/>
               </a:rPr>
-              <a:t>The GIS KPI Dashboard digitises how the GIS Team plans, measures and proves performance. Every employee carries five weighted KPIs from the approved 2026 workbook; every result is backed by captured activity and reviewable evidence; every official score is frozen as a reproducible snapshot.</a:t>
+              <a:t>The GIS KPI Dashboard digitises how the GIS Team plans, measures and proves performance. Every employee carries five core KPIs from the approved 2026 workbook plus four shared non-core KPIs — 100 weighted points in all; every result is backed by captured activity and reviewable evidence; every official score is frozen as a reproducible snapshot.</a:t>
             </a:r>
             <a:endParaRPr lang="en-US" sz="1350" dirty="0"/>
           </a:p>
@@ -4164,7 +4164,7 @@
                 <a:ea typeface="Calibri" pitchFamily="34" charset="-122"/>
                 <a:cs typeface="Calibri" pitchFamily="34" charset="-120"/>
               </a:rPr>
-              <a:t>KPI assignments</a:t>
+              <a:t>Core KPI assignments</a:t>
             </a:r>
             <a:endParaRPr lang="en-US" sz="1150" dirty="0"/>
           </a:p>
@@ -4440,7 +4440,7 @@
                 <a:ea typeface="Calibri" pitchFamily="34" charset="-122"/>
                 <a:cs typeface="Calibri" pitchFamily="34" charset="-120"/>
               </a:rPr>
-              <a:t>80</a:t>
+              <a:t>100</a:t>
             </a:r>
             <a:endParaRPr lang="en-US" sz="4000" dirty="0"/>
           </a:p>
@@ -4479,7 +4479,7 @@
                 <a:ea typeface="Calibri" pitchFamily="34" charset="-122"/>
                 <a:cs typeface="Calibri" pitchFamily="34" charset="-120"/>
               </a:rPr>
-              <a:t>Points configured weight</a:t>
+              <a:t>Points per person (80 core + 20 non-core)</a:t>
             </a:r>
             <a:endParaRPr lang="en-US" sz="1150" dirty="0"/>
           </a:p>
@@ -4637,7 +4637,7 @@
                 <a:ea typeface="Calibri" pitchFamily="34" charset="-122"/>
                 <a:cs typeface="Calibri" pitchFamily="34" charset="-120"/>
               </a:rPr>
-              <a:t>The 80 / 100 rule</a:t>
+              <a:t>Core 80 + non-core 20 = 100</a:t>
             </a:r>
             <a:endParaRPr lang="en-US" sz="1180" dirty="0"/>
           </a:p>
@@ -4657,7 +4657,7 @@
                 <a:ea typeface="Calibri" pitchFamily="34" charset="-122"/>
                 <a:cs typeface="Calibri" pitchFamily="34" charset="-120"/>
               </a:rPr>
-              <a:t>Each employee's five weights total 80 points, not 100. Scores are shown against the true configured maximum everywhere and are never silently rebased — closing the gap is an explicit, audit-logged admin decision.</a:t>
+              <a:t>The workbook's five core weights total 80 points, preserved verbatim. The remaining 20 points come from four shared non-core KPIs adopted from the 2025 workbook by an explicit, audit-logged decision — core and non-core labelled apart on every scorecard.</a:t>
             </a:r>
             <a:endParaRPr lang="en-US" sz="1180" dirty="0"/>
           </a:p>
@@ -4699,7 +4699,7 @@
                 <a:ea typeface="Calibri" pitchFamily="34" charset="-122"/>
                 <a:cs typeface="Calibri" pitchFamily="34" charset="-120"/>
               </a:rPr>
-              <a:t>Five KPIs per employee — each with a target, measurement mode, weight in points and an evidence requirement. Definitions are versioned; old scores keep the rules they were approved under.</a:t>
+              <a:t>Five core KPIs per employee plus four shared non-core KPIs — safety hazard reporting, compliance recertification, internal customer satisfaction and training hours (5 points each). Definitions are versioned; old scores keep the rules they were approved under.</a:t>
             </a:r>
             <a:endParaRPr lang="en-US" sz="1150" dirty="0"/>
           </a:p>
@@ -6936,7 +6936,7 @@
                 <a:ea typeface="Consolas" pitchFamily="34" charset="-122"/>
                 <a:cs typeface="Consolas" pitchFamily="34" charset="-120"/>
               </a:rPr>
-              <a:t>Σ over 5 KPIs (out of 80)</a:t>
+              <a:t>Σ over all KPIs (out of 100)</a:t>
             </a:r>
             <a:endParaRPr lang="en-US" sz="1200" dirty="0"/>
           </a:p>
@@ -7347,7 +7347,7 @@
                 <a:ea typeface="Calibri" pitchFamily="34" charset="-122"/>
                 <a:cs typeface="Calibri" pitchFamily="34" charset="-120"/>
               </a:rPr>
-              <a:t>Overrides are allowed — never quiet.  </a:t>
+              <a:t>Overrides &amp; recalls — never quiet.  </a:t>
             </a:r>
             <a:pPr algn="l" indent="0" marL="0">
               <a:lnSpc>
@@ -7364,7 +7364,7 @@
                 <a:ea typeface="Calibri" pitchFamily="34" charset="-122"/>
                 <a:cs typeface="Calibri" pitchFamily="34" charset="-120"/>
               </a:rPr>
-              <a:t>An override requires a written reason, keeps the engine's number alongside, and is audit-logged. Locked periods accept no further change.</a:t>
+              <a:t>An override requires a written reason and keeps the engine's number alongside; rejections and period approvals can be recalled via a post-action Undo. Everything is audit-logged, and locked periods accept no further change.</a:t>
             </a:r>
             <a:endParaRPr lang="en-US" sz="1150" dirty="0"/>
           </a:p>
@@ -7570,7 +7570,7 @@
                 <a:ea typeface="Calibri" pitchFamily="34" charset="-122"/>
                 <a:cs typeface="Calibri" pitchFamily="34" charset="-120"/>
               </a:rPr>
-              <a:t>Approved team score, the 80/100 gap made visible, evidence coverage, overdue periods and the review backlog.</a:t>
+              <a:t>Approved team score out of 100 (core + non-core labelled apart), workflow posture, evidence coverage, overdue periods and the review backlog.</a:t>
             </a:r>
             <a:endParaRPr lang="en-US" sz="1350" dirty="0"/>
           </a:p>
@@ -7748,7 +7748,7 @@
                 <a:ea typeface="Calibri" pitchFamily="34" charset="-122"/>
                 <a:cs typeface="Calibri" pitchFamily="34" charset="-120"/>
               </a:rPr>
-              <a:t>One employee's five KPIs: target, actual, attainment, weight, contribution — plus timeline, evidence gallery and score history.</a:t>
+              <a:t>One employee's KPIs: target, actual, attainment, weight, contribution — plus timeline, evidence gallery, score history and per-employee analytics with peer context.</a:t>
             </a:r>
             <a:endParaRPr lang="en-US" sz="1350" dirty="0"/>
           </a:p>
@@ -7893,7 +7893,7 @@
                 <a:ea typeface="Calibri" pitchFamily="34" charset="-122"/>
                 <a:cs typeface="Calibri" pitchFamily="34" charset="-120"/>
               </a:rPr>
-              <a:t>A 7-sheet typed Excel workbook and a deterministic PDF — with an optional AI narrative that only explains the engine's numbers, ships with a disclaimer and approval status, and records provider, model and prompt version in the audit log.</a:t>
+              <a:t>A 7-sheet typed Excel workbook and a deterministic PDF with embedded engine-drawn charts (weighted-score and attainment bars by status band) — plus an optional AI narrative that only explains the engine's numbers, ships with a disclaimer and approval status, and records provider, model and prompt version in the audit log.</a:t>
             </a:r>
             <a:endParaRPr lang="en-US" sz="1200" dirty="0"/>
           </a:p>
